--- a/dataset/guides_final/HW/manual/IT-HW-003-M_프린터·복합기 처리 매뉴얼.pptx
+++ b/dataset/guides_final/HW/manual/IT-HW-003-M_프린터·복합기 처리 매뉴얼.pptx
@@ -37656,7 +37656,7 @@
                 <a:ea typeface="Malgun Gothic"/>
                 <a:cs typeface="Malgun Gothic"/>
               </a:rPr>
-              <a:t>티켓: 담당자 조치가 필요한 건. 담당팀에 배정하고 상태를 RDY → IP → FIN → CLS 으로 관리한다.</a:t>
+              <a:t>티켓: 담당자 조치가 필요한 건. 담당팀에 배정하고 상태를 RDY → WIP → FIN → CLS 으로 관리한다.</a:t>
             </a:r>
           </a:p>
         </p:txBody>

--- a/dataset/guides_final/HW/manual/IT-HW-003-M_프린터·복합기 처리 매뉴얼.pptx
+++ b/dataset/guides_final/HW/manual/IT-HW-003-M_프린터·복합기 처리 매뉴얼.pptx
@@ -3249,7 +3249,7 @@
                 <a:ea typeface="Malgun Gothic"/>
                 <a:cs typeface="Malgun Gothic"/>
               </a:rPr>
-              <a:t>한화시스템 ICT IT 담당자 매뉴얼 · HW·업무 PC</a:t>
+              <a:t>가상 ICT 기업 IT 담당자 매뉴얼 · HW·업무 PC</a:t>
             </a:r>
           </a:p>
         </p:txBody>
@@ -3528,7 +3528,7 @@
                 <a:ea typeface="Malgun Gothic"/>
                 <a:cs typeface="Malgun Gothic"/>
               </a:rPr>
-              <a:t>© HANWHA SYSTEMS ICT · IT-HW-003-M · 사내 제한</a:t>
+              <a:t>© 가상 ICT 기업 · IT-HW-003-M · 사내 제한</a:t>
             </a:r>
           </a:p>
         </p:txBody>
@@ -4921,7 +4921,7 @@
                 <a:ea typeface="Malgun Gothic"/>
                 <a:cs typeface="Malgun Gothic"/>
               </a:rPr>
-              <a:t>© HANWHA SYSTEMS ICT · IT-HW-003-M · 사내 제한</a:t>
+              <a:t>© 가상 ICT 기업 · IT-HW-003-M · 사내 제한</a:t>
             </a:r>
           </a:p>
         </p:txBody>
@@ -5838,7 +5838,7 @@
                 <a:ea typeface="Malgun Gothic"/>
                 <a:cs typeface="Malgun Gothic"/>
               </a:rPr>
-              <a:t>© HANWHA SYSTEMS ICT · IT-HW-003-M · 사내 제한</a:t>
+              <a:t>© 가상 ICT 기업 · IT-HW-003-M · 사내 제한</a:t>
             </a:r>
           </a:p>
         </p:txBody>
@@ -6964,7 +6964,7 @@
                 <a:ea typeface="Malgun Gothic"/>
                 <a:cs typeface="Malgun Gothic"/>
               </a:rPr>
-              <a:t>© HANWHA SYSTEMS ICT · IT-HW-003-M · 사내 제한</a:t>
+              <a:t>© 가상 ICT 기업 · IT-HW-003-M · 사내 제한</a:t>
             </a:r>
           </a:p>
         </p:txBody>
@@ -8145,7 +8145,7 @@
                 <a:ea typeface="Malgun Gothic"/>
                 <a:cs typeface="Malgun Gothic"/>
               </a:rPr>
-              <a:t>© HANWHA SYSTEMS ICT · IT-HW-003-M · 사내 제한</a:t>
+              <a:t>© 가상 ICT 기업 · IT-HW-003-M · 사내 제한</a:t>
             </a:r>
           </a:p>
         </p:txBody>
@@ -9062,7 +9062,7 @@
                 <a:ea typeface="Malgun Gothic"/>
                 <a:cs typeface="Malgun Gothic"/>
               </a:rPr>
-              <a:t>© HANWHA SYSTEMS ICT · IT-HW-003-M · 사내 제한</a:t>
+              <a:t>© 가상 ICT 기업 · IT-HW-003-M · 사내 제한</a:t>
             </a:r>
           </a:p>
         </p:txBody>
@@ -10188,7 +10188,7 @@
                 <a:ea typeface="Malgun Gothic"/>
                 <a:cs typeface="Malgun Gothic"/>
               </a:rPr>
-              <a:t>© HANWHA SYSTEMS ICT · IT-HW-003-M · 사내 제한</a:t>
+              <a:t>© 가상 ICT 기업 · IT-HW-003-M · 사내 제한</a:t>
             </a:r>
           </a:p>
         </p:txBody>
@@ -11463,7 +11463,7 @@
                 <a:ea typeface="Malgun Gothic"/>
                 <a:cs typeface="Malgun Gothic"/>
               </a:rPr>
-              <a:t>© HANWHA SYSTEMS ICT · IT-HW-003-M · 사내 제한</a:t>
+              <a:t>© 가상 ICT 기업 · IT-HW-003-M · 사내 제한</a:t>
             </a:r>
           </a:p>
         </p:txBody>
@@ -12380,7 +12380,7 @@
                 <a:ea typeface="Malgun Gothic"/>
                 <a:cs typeface="Malgun Gothic"/>
               </a:rPr>
-              <a:t>© HANWHA SYSTEMS ICT · IT-HW-003-M · 사내 제한</a:t>
+              <a:t>© 가상 ICT 기업 · IT-HW-003-M · 사내 제한</a:t>
             </a:r>
           </a:p>
         </p:txBody>
@@ -13506,7 +13506,7 @@
                 <a:ea typeface="Malgun Gothic"/>
                 <a:cs typeface="Malgun Gothic"/>
               </a:rPr>
-              <a:t>© HANWHA SYSTEMS ICT · IT-HW-003-M · 사내 제한</a:t>
+              <a:t>© 가상 ICT 기업 · IT-HW-003-M · 사내 제한</a:t>
             </a:r>
           </a:p>
         </p:txBody>
@@ -14781,7 +14781,7 @@
                 <a:ea typeface="Malgun Gothic"/>
                 <a:cs typeface="Malgun Gothic"/>
               </a:rPr>
-              <a:t>© HANWHA SYSTEMS ICT · IT-HW-003-M · 사내 제한</a:t>
+              <a:t>© 가상 ICT 기업 · IT-HW-003-M · 사내 제한</a:t>
             </a:r>
           </a:p>
         </p:txBody>
@@ -16424,7 +16424,7 @@
                 <a:ea typeface="Malgun Gothic"/>
                 <a:cs typeface="Malgun Gothic"/>
               </a:rPr>
-              <a:t>© HANWHA SYSTEMS ICT · IT-HW-003-M · 사내 제한</a:t>
+              <a:t>© 가상 ICT 기업 · IT-HW-003-M · 사내 제한</a:t>
             </a:r>
           </a:p>
         </p:txBody>
@@ -17341,7 +17341,7 @@
                 <a:ea typeface="Malgun Gothic"/>
                 <a:cs typeface="Malgun Gothic"/>
               </a:rPr>
-              <a:t>© HANWHA SYSTEMS ICT · IT-HW-003-M · 사내 제한</a:t>
+              <a:t>© 가상 ICT 기업 · IT-HW-003-M · 사내 제한</a:t>
             </a:r>
           </a:p>
         </p:txBody>
@@ -18467,7 +18467,7 @@
                 <a:ea typeface="Malgun Gothic"/>
                 <a:cs typeface="Malgun Gothic"/>
               </a:rPr>
-              <a:t>© HANWHA SYSTEMS ICT · IT-HW-003-M · 사내 제한</a:t>
+              <a:t>© 가상 ICT 기업 · IT-HW-003-M · 사내 제한</a:t>
             </a:r>
           </a:p>
         </p:txBody>
@@ -19836,7 +19836,7 @@
                 <a:ea typeface="Malgun Gothic"/>
                 <a:cs typeface="Malgun Gothic"/>
               </a:rPr>
-              <a:t>© HANWHA SYSTEMS ICT · IT-HW-003-M · 사내 제한</a:t>
+              <a:t>© 가상 ICT 기업 · IT-HW-003-M · 사내 제한</a:t>
             </a:r>
           </a:p>
         </p:txBody>
@@ -20753,7 +20753,7 @@
                 <a:ea typeface="Malgun Gothic"/>
                 <a:cs typeface="Malgun Gothic"/>
               </a:rPr>
-              <a:t>© HANWHA SYSTEMS ICT · IT-HW-003-M · 사내 제한</a:t>
+              <a:t>© 가상 ICT 기업 · IT-HW-003-M · 사내 제한</a:t>
             </a:r>
           </a:p>
         </p:txBody>
@@ -21879,7 +21879,7 @@
                 <a:ea typeface="Malgun Gothic"/>
                 <a:cs typeface="Malgun Gothic"/>
               </a:rPr>
-              <a:t>© HANWHA SYSTEMS ICT · IT-HW-003-M · 사내 제한</a:t>
+              <a:t>© 가상 ICT 기업 · IT-HW-003-M · 사내 제한</a:t>
             </a:r>
           </a:p>
         </p:txBody>
@@ -23154,7 +23154,7 @@
                 <a:ea typeface="Malgun Gothic"/>
                 <a:cs typeface="Malgun Gothic"/>
               </a:rPr>
-              <a:t>© HANWHA SYSTEMS ICT · IT-HW-003-M · 사내 제한</a:t>
+              <a:t>© 가상 ICT 기업 · IT-HW-003-M · 사내 제한</a:t>
             </a:r>
           </a:p>
         </p:txBody>
@@ -24071,7 +24071,7 @@
                 <a:ea typeface="Malgun Gothic"/>
                 <a:cs typeface="Malgun Gothic"/>
               </a:rPr>
-              <a:t>© HANWHA SYSTEMS ICT · IT-HW-003-M · 사내 제한</a:t>
+              <a:t>© 가상 ICT 기업 · IT-HW-003-M · 사내 제한</a:t>
             </a:r>
           </a:p>
         </p:txBody>
@@ -25197,7 +25197,7 @@
                 <a:ea typeface="Malgun Gothic"/>
                 <a:cs typeface="Malgun Gothic"/>
               </a:rPr>
-              <a:t>© HANWHA SYSTEMS ICT · IT-HW-003-M · 사내 제한</a:t>
+              <a:t>© 가상 ICT 기업 · IT-HW-003-M · 사내 제한</a:t>
             </a:r>
           </a:p>
         </p:txBody>
@@ -26566,7 +26566,7 @@
                 <a:ea typeface="Malgun Gothic"/>
                 <a:cs typeface="Malgun Gothic"/>
               </a:rPr>
-              <a:t>© HANWHA SYSTEMS ICT · IT-HW-003-M · 사내 제한</a:t>
+              <a:t>© 가상 ICT 기업 · IT-HW-003-M · 사내 제한</a:t>
             </a:r>
           </a:p>
         </p:txBody>
@@ -27483,7 +27483,7 @@
                 <a:ea typeface="Malgun Gothic"/>
                 <a:cs typeface="Malgun Gothic"/>
               </a:rPr>
-              <a:t>© HANWHA SYSTEMS ICT · IT-HW-003-M · 사내 제한</a:t>
+              <a:t>© 가상 ICT 기업 · IT-HW-003-M · 사내 제한</a:t>
             </a:r>
           </a:p>
         </p:txBody>
@@ -28629,7 +28629,7 @@
                 <a:ea typeface="Malgun Gothic"/>
                 <a:cs typeface="Malgun Gothic"/>
               </a:rPr>
-              <a:t>© HANWHA SYSTEMS ICT · IT-HW-003-M · 사내 제한</a:t>
+              <a:t>© 가상 ICT 기업 · IT-HW-003-M · 사내 제한</a:t>
             </a:r>
           </a:p>
         </p:txBody>
@@ -28877,7 +28877,7 @@
                 <a:ea typeface="Malgun Gothic"/>
                 <a:cs typeface="Malgun Gothic"/>
               </a:rPr>
-              <a:t>© HANWHA SYSTEMS ICT · IT-HW-003-M · 사내 제한</a:t>
+              <a:t>© 가상 ICT 기업 · IT-HW-003-M · 사내 제한</a:t>
             </a:r>
           </a:p>
         </p:txBody>
@@ -29536,7 +29536,7 @@
                 <a:ea typeface="Malgun Gothic"/>
                 <a:cs typeface="Malgun Gothic"/>
               </a:rPr>
-              <a:t>© HANWHA SYSTEMS ICT · IT-HW-003-M · 사내 제한</a:t>
+              <a:t>© 가상 ICT 기업 · IT-HW-003-M · 사내 제한</a:t>
             </a:r>
           </a:p>
         </p:txBody>
@@ -29784,7 +29784,7 @@
                 <a:ea typeface="Malgun Gothic"/>
                 <a:cs typeface="Malgun Gothic"/>
               </a:rPr>
-              <a:t>© HANWHA SYSTEMS ICT · IT-HW-003-M · 사내 제한</a:t>
+              <a:t>© 가상 ICT 기업 · IT-HW-003-M · 사내 제한</a:t>
             </a:r>
           </a:p>
         </p:txBody>
@@ -30812,7 +30812,7 @@
                 <a:ea typeface="Malgun Gothic"/>
                 <a:cs typeface="Malgun Gothic"/>
               </a:rPr>
-              <a:t>© HANWHA SYSTEMS ICT · IT-HW-003-M · 사내 제한</a:t>
+              <a:t>© 가상 ICT 기업 · IT-HW-003-M · 사내 제한</a:t>
             </a:r>
           </a:p>
         </p:txBody>
@@ -31060,7 +31060,7 @@
                 <a:ea typeface="Malgun Gothic"/>
                 <a:cs typeface="Malgun Gothic"/>
               </a:rPr>
-              <a:t>© HANWHA SYSTEMS ICT · IT-HW-003-M · 사내 제한</a:t>
+              <a:t>© 가상 ICT 기업 · IT-HW-003-M · 사내 제한</a:t>
             </a:r>
           </a:p>
         </p:txBody>
@@ -31640,7 +31640,7 @@
                 <a:ea typeface="Malgun Gothic"/>
                 <a:cs typeface="Malgun Gothic"/>
               </a:rPr>
-              <a:t>© HANWHA SYSTEMS ICT · IT-HW-003-M · 사내 제한</a:t>
+              <a:t>© 가상 ICT 기업 · IT-HW-003-M · 사내 제한</a:t>
             </a:r>
           </a:p>
         </p:txBody>
@@ -32617,7 +32617,7 @@
                 <a:ea typeface="Malgun Gothic"/>
                 <a:cs typeface="Malgun Gothic"/>
               </a:rPr>
-              <a:t>© HANWHA SYSTEMS ICT · IT-HW-003-M · 사내 제한</a:t>
+              <a:t>© 가상 ICT 기업 · IT-HW-003-M · 사내 제한</a:t>
             </a:r>
           </a:p>
         </p:txBody>
@@ -32865,7 +32865,7 @@
                 <a:ea typeface="Malgun Gothic"/>
                 <a:cs typeface="Malgun Gothic"/>
               </a:rPr>
-              <a:t>© HANWHA SYSTEMS ICT · IT-HW-003-M · 사내 제한</a:t>
+              <a:t>© 가상 ICT 기업 · IT-HW-003-M · 사내 제한</a:t>
             </a:r>
           </a:p>
         </p:txBody>
@@ -33763,7 +33763,7 @@
                 <a:ea typeface="Malgun Gothic"/>
                 <a:cs typeface="Malgun Gothic"/>
               </a:rPr>
-              <a:t>© HANWHA SYSTEMS ICT · IT-HW-003-M · 사내 제한</a:t>
+              <a:t>© 가상 ICT 기업 · IT-HW-003-M · 사내 제한</a:t>
             </a:r>
           </a:p>
         </p:txBody>
@@ -34011,7 +34011,7 @@
                 <a:ea typeface="Malgun Gothic"/>
                 <a:cs typeface="Malgun Gothic"/>
               </a:rPr>
-              <a:t>© HANWHA SYSTEMS ICT · IT-HW-003-M · 사내 제한</a:t>
+              <a:t>© 가상 ICT 기업 · IT-HW-003-M · 사내 제한</a:t>
             </a:r>
           </a:p>
         </p:txBody>
@@ -37938,7 +37938,7 @@
                 <a:ea typeface="Malgun Gothic"/>
                 <a:cs typeface="Malgun Gothic"/>
               </a:rPr>
-              <a:t>© HANWHA SYSTEMS ICT · IT-HW-003-M · 사내 제한</a:t>
+              <a:t>© 가상 ICT 기업 · IT-HW-003-M · 사내 제한</a:t>
             </a:r>
           </a:p>
         </p:txBody>
@@ -38186,7 +38186,7 @@
                 <a:ea typeface="Malgun Gothic"/>
                 <a:cs typeface="Malgun Gothic"/>
               </a:rPr>
-              <a:t>© HANWHA SYSTEMS ICT · IT-HW-003-M · 사내 제한</a:t>
+              <a:t>© 가상 ICT 기업 · IT-HW-003-M · 사내 제한</a:t>
             </a:r>
           </a:p>
         </p:txBody>
@@ -39312,7 +39312,7 @@
                 <a:ea typeface="Malgun Gothic"/>
                 <a:cs typeface="Malgun Gothic"/>
               </a:rPr>
-              <a:t>© HANWHA SYSTEMS ICT · IT-HW-003-M · 사내 제한</a:t>
+              <a:t>© 가상 ICT 기업 · IT-HW-003-M · 사내 제한</a:t>
             </a:r>
           </a:p>
         </p:txBody>
